--- a/docs/slides/MX17_results.pptx
+++ b/docs/slides/MX17_results.pptx
@@ -5382,7 +5382,7 @@
                   <a:srgbClr val="555555"/>
                 </a:solidFill>
               </a:rPr>
-              <a:t>4 Micromegas arms, front face ≈ 22 cm from the target, 30 mm drift gap — the e⁺ e⁻ directions.</a:t>
+              <a:t>4 Micromegas arms, front face ≈ 25 cm from the target, 30 mm drift gap — the e⁺ e⁻ directions.</a:t>
             </a:r>
           </a:p>
           <a:p>

--- a/docs/slides/MX17_results.pptx
+++ b/docs/slides/MX17_results.pptx
@@ -17,6 +17,10 @@
     <p:sldId id="265" r:id="rId17"/>
     <p:sldId id="266" r:id="rId18"/>
     <p:sldId id="267" r:id="rId19"/>
+    <p:sldId id="268" r:id="rId20"/>
+    <p:sldId id="269" r:id="rId21"/>
+    <p:sldId id="270" r:id="rId22"/>
+    <p:sldId id="271" r:id="rId23"/>
   </p:sldIdLst>
   <p:sldSz cx="12191695" cy="6858000" type="screen4x3"/>
   <p:notesSz cx="6858000" cy="9144000"/>
@@ -653,7 +657,287 @@
           <a:lstStyle/>
           <a:p>
             <a:r>
+              <a:t>Significance projection (open item from the summary slide). Numbers from scripts/make_slides_figures.py templates fed through an Asimov binned profile-likelihood: Z = sqrt(2 sum[(s+b)ln(1+s/b)-s]). July smeared Z=2.64 (truth 3.94), LS3 smeared Z=4.89 (truth 7.29); 2deg vs 8deg binning agree to &lt;1%; a best single theta-window cut-and-count gives ~2.5 / 4.7 sigma (the broad shoulder makes counting nearly as good as the full fit). CRITICAL CAVEAT (the red box): these assume the IPC angular shape equals MC truth. Not included: physics shape uncertainty (single-E1 assumption), and — emphasised by D.N. — detector / acceptance shape distortion: track-pair separation inefficiency at small opening angle, and active-area geometric acceptance falling off for wide-angle pairs (the signal region). These reshape the IPC template where the signal sits and will dominate the final CL. Do not quote these as a final confidence level.</a:t>
+            </a:r>
+          </a:p>
+        </p:txBody>
+      </p:sp>
+      <p:sp>
+        <p:nvSpPr>
+          <p:cNvPr id="4" name="Slide Number Placeholder 3"/>
+          <p:cNvSpPr>
+            <a:spLocks noGrp="1"/>
+          </p:cNvSpPr>
+          <p:nvPr>
+            <p:ph type="sldNum" idx="5" sz="quarter"/>
+          </p:nvPr>
+        </p:nvSpPr>
+        <p:spPr/>
+      </p:sp>
+    </p:spTree>
+  </p:cSld>
+  <p:clrMapOvr>
+    <a:masterClrMapping/>
+  </p:clrMapOvr>
+</p:notes>
+</file>
+
+<file path=ppt/notesSlides/notesSlide12.xml><?xml version="1.0" encoding="utf-8"?>
+<p:notes xmlns:a="http://schemas.openxmlformats.org/drawingml/2006/main" xmlns:p="http://schemas.openxmlformats.org/presentationml/2006/main" xmlns:r="http://schemas.openxmlformats.org/officeDocument/2006/relationships">
+  <p:cSld>
+    <p:spTree>
+      <p:nvGrpSpPr>
+        <p:cNvPr id="1" name=""/>
+        <p:cNvGrpSpPr/>
+        <p:nvPr/>
+      </p:nvGrpSpPr>
+      <p:grpSpPr>
+        <a:xfrm>
+          <a:off x="0" y="0"/>
+          <a:ext cx="0" cy="0"/>
+          <a:chOff x="0" y="0"/>
+          <a:chExt cx="0" cy="0"/>
+        </a:xfrm>
+      </p:grpSpPr>
+      <p:sp>
+        <p:nvSpPr>
+          <p:cNvPr id="2" name="Slide Image Placeholder 1"/>
+          <p:cNvSpPr>
+            <a:spLocks noGrp="1"/>
+          </p:cNvSpPr>
+          <p:nvPr>
+            <p:ph type="sldImg" idx="2"/>
+          </p:nvPr>
+        </p:nvSpPr>
+        <p:spPr/>
+      </p:sp>
+      <p:sp>
+        <p:nvSpPr>
+          <p:cNvPr id="3" name="Notes Placeholder 2"/>
+          <p:cNvSpPr>
+            <a:spLocks noGrp="1"/>
+          </p:cNvSpPr>
+          <p:nvPr>
+            <p:ph type="body" idx="3" sz="quarter"/>
+          </p:nvPr>
+        </p:nvSpPr>
+        <p:spPr/>
+        <p:txBody>
+          <a:bodyPr/>
+          <a:lstStyle/>
+          <a:p>
+            <a:r>
               <a:t>Wrap-up. The program is now an acceptance-and-backgrounds problem, not a production one. Next analysis step: wire the smeared templates into the fast-MC likelihood fit and quote expected significance vs run time.</a:t>
+            </a:r>
+          </a:p>
+        </p:txBody>
+      </p:sp>
+      <p:sp>
+        <p:nvSpPr>
+          <p:cNvPr id="4" name="Slide Number Placeholder 3"/>
+          <p:cNvSpPr>
+            <a:spLocks noGrp="1"/>
+          </p:cNvSpPr>
+          <p:nvPr>
+            <p:ph type="sldNum" idx="5" sz="quarter"/>
+          </p:nvPr>
+        </p:nvSpPr>
+        <p:spPr/>
+      </p:sp>
+    </p:spTree>
+  </p:cSld>
+  <p:clrMapOvr>
+    <a:masterClrMapping/>
+  </p:clrMapOvr>
+</p:notes>
+</file>
+
+<file path=ppt/notesSlides/notesSlide13.xml><?xml version="1.0" encoding="utf-8"?>
+<p:notes xmlns:a="http://schemas.openxmlformats.org/drawingml/2006/main" xmlns:p="http://schemas.openxmlformats.org/presentationml/2006/main" xmlns:r="http://schemas.openxmlformats.org/officeDocument/2006/relationships">
+  <p:cSld>
+    <p:spTree>
+      <p:nvGrpSpPr>
+        <p:cNvPr id="1" name=""/>
+        <p:cNvGrpSpPr/>
+        <p:nvPr/>
+      </p:nvGrpSpPr>
+      <p:grpSpPr>
+        <a:xfrm>
+          <a:off x="0" y="0"/>
+          <a:ext cx="0" cy="0"/>
+          <a:chOff x="0" y="0"/>
+          <a:chExt cx="0" cy="0"/>
+        </a:xfrm>
+      </p:grpSpPr>
+      <p:sp>
+        <p:nvSpPr>
+          <p:cNvPr id="2" name="Slide Image Placeholder 1"/>
+          <p:cNvSpPr>
+            <a:spLocks noGrp="1"/>
+          </p:cNvSpPr>
+          <p:nvPr>
+            <p:ph type="sldImg" idx="2"/>
+          </p:nvPr>
+        </p:nvSpPr>
+        <p:spPr/>
+      </p:sp>
+      <p:sp>
+        <p:nvSpPr>
+          <p:cNvPr id="3" name="Notes Placeholder 2"/>
+          <p:cNvSpPr>
+            <a:spLocks noGrp="1"/>
+          </p:cNvSpPr>
+          <p:nvPr>
+            <p:ph type="body" idx="3" sz="quarter"/>
+          </p:nvPr>
+        </p:nvSpPr>
+        <p:spPr/>
+        <p:txBody>
+          <a:bodyPr/>
+          <a:lstStyle/>
+          <a:p>
+            <a:r>
+              <a:t>Backup versions of the slide 4 (July) and slide 5 (July vs LS3) stacked opening-angle spectra, rebinned by a factor of 4 (2 deg -&gt; 8 deg bins) per collaborator request. Identical event samples, yields and normalisation as the main slides; only the histogram binning differs. 90 base bins are not divisible by 4, so the final 176-180 deg bin holds the 2 leftover base bins (negligible -- the distribution is empty there). Figures: scripts/make_slides_figures.py (rebin=4).</a:t>
+            </a:r>
+          </a:p>
+        </p:txBody>
+      </p:sp>
+      <p:sp>
+        <p:nvSpPr>
+          <p:cNvPr id="4" name="Slide Number Placeholder 3"/>
+          <p:cNvSpPr>
+            <a:spLocks noGrp="1"/>
+          </p:cNvSpPr>
+          <p:nvPr>
+            <p:ph type="sldNum" idx="5" sz="quarter"/>
+          </p:nvPr>
+        </p:nvSpPr>
+        <p:spPr/>
+      </p:sp>
+    </p:spTree>
+  </p:cSld>
+  <p:clrMapOvr>
+    <a:masterClrMapping/>
+  </p:clrMapOvr>
+</p:notes>
+</file>
+
+<file path=ppt/notesSlides/notesSlide14.xml><?xml version="1.0" encoding="utf-8"?>
+<p:notes xmlns:a="http://schemas.openxmlformats.org/drawingml/2006/main" xmlns:p="http://schemas.openxmlformats.org/presentationml/2006/main" xmlns:r="http://schemas.openxmlformats.org/officeDocument/2006/relationships">
+  <p:cSld>
+    <p:spTree>
+      <p:nvGrpSpPr>
+        <p:cNvPr id="1" name=""/>
+        <p:cNvGrpSpPr/>
+        <p:nvPr/>
+      </p:nvGrpSpPr>
+      <p:grpSpPr>
+        <a:xfrm>
+          <a:off x="0" y="0"/>
+          <a:ext cx="0" cy="0"/>
+          <a:chOff x="0" y="0"/>
+          <a:chExt cx="0" cy="0"/>
+        </a:xfrm>
+      </p:grpSpPr>
+      <p:sp>
+        <p:nvSpPr>
+          <p:cNvPr id="2" name="Slide Image Placeholder 1"/>
+          <p:cNvSpPr>
+            <a:spLocks noGrp="1"/>
+          </p:cNvSpPr>
+          <p:nvPr>
+            <p:ph type="sldImg" idx="2"/>
+          </p:nvPr>
+        </p:nvSpPr>
+        <p:spPr/>
+      </p:sp>
+      <p:sp>
+        <p:nvSpPr>
+          <p:cNvPr id="3" name="Notes Placeholder 2"/>
+          <p:cNvSpPr>
+            <a:spLocks noGrp="1"/>
+          </p:cNvSpPr>
+          <p:nvPr>
+            <p:ph type="body" idx="3" sz="quarter"/>
+          </p:nvPr>
+        </p:nvSpPr>
+        <p:spPr/>
+        <p:txBody>
+          <a:bodyPr/>
+          <a:lstStyle/>
+          <a:p>
+            <a:r>
+              <a:t>Backup rebinned (x4) twin of slide 4. Same recorded yields (64 X17 / 3093 IPC, S/B 0.021); only the display binning is coarser. Use to answer the collaborator's rebinning request; do not read a confidence level off the binning -- that comes from the template-fit / counting analysis (see notes).</a:t>
+            </a:r>
+          </a:p>
+        </p:txBody>
+      </p:sp>
+      <p:sp>
+        <p:nvSpPr>
+          <p:cNvPr id="4" name="Slide Number Placeholder 3"/>
+          <p:cNvSpPr>
+            <a:spLocks noGrp="1"/>
+          </p:cNvSpPr>
+          <p:nvPr>
+            <p:ph type="sldNum" idx="5" sz="quarter"/>
+          </p:nvPr>
+        </p:nvSpPr>
+        <p:spPr/>
+      </p:sp>
+    </p:spTree>
+  </p:cSld>
+  <p:clrMapOvr>
+    <a:masterClrMapping/>
+  </p:clrMapOvr>
+</p:notes>
+</file>
+
+<file path=ppt/notesSlides/notesSlide15.xml><?xml version="1.0" encoding="utf-8"?>
+<p:notes xmlns:a="http://schemas.openxmlformats.org/drawingml/2006/main" xmlns:p="http://schemas.openxmlformats.org/presentationml/2006/main" xmlns:r="http://schemas.openxmlformats.org/officeDocument/2006/relationships">
+  <p:cSld>
+    <p:spTree>
+      <p:nvGrpSpPr>
+        <p:cNvPr id="1" name=""/>
+        <p:cNvGrpSpPr/>
+        <p:nvPr/>
+      </p:nvGrpSpPr>
+      <p:grpSpPr>
+        <a:xfrm>
+          <a:off x="0" y="0"/>
+          <a:ext cx="0" cy="0"/>
+          <a:chOff x="0" y="0"/>
+          <a:chExt cx="0" cy="0"/>
+        </a:xfrm>
+      </p:grpSpPr>
+      <p:sp>
+        <p:nvSpPr>
+          <p:cNvPr id="2" name="Slide Image Placeholder 1"/>
+          <p:cNvSpPr>
+            <a:spLocks noGrp="1"/>
+          </p:cNvSpPr>
+          <p:nvPr>
+            <p:ph type="sldImg" idx="2"/>
+          </p:nvPr>
+        </p:nvSpPr>
+        <p:spPr/>
+      </p:sp>
+      <p:sp>
+        <p:nvSpPr>
+          <p:cNvPr id="3" name="Notes Placeholder 2"/>
+          <p:cNvSpPr>
+            <a:spLocks noGrp="1"/>
+          </p:cNvSpPr>
+          <p:nvPr>
+            <p:ph type="body" idx="3" sz="quarter"/>
+          </p:nvPr>
+        </p:nvSpPr>
+        <p:spPr/>
+        <p:txBody>
+          <a:bodyPr/>
+          <a:lstStyle/>
+          <a:p>
+            <a:r>
+              <a:t>Backup rebinned (x4) twin of slide 5 (fig_stacked_compare_rebin4). Identical to slide 5 apart from the 8 deg display binning.</a:t>
             </a:r>
           </a:p>
         </p:txBody>
@@ -4950,7 +5234,7 @@
                   <a:srgbClr val="1F3A5F"/>
                 </a:solidFill>
               </a:rPr>
-              <a:t>Summary &amp; status</a:t>
+              <a:t>Expected significance — a statistical ceiling, not the final CL</a:t>
             </a:r>
           </a:p>
         </p:txBody>
@@ -4963,8 +5247,8 @@
         </p:nvSpPr>
         <p:spPr>
           <a:xfrm>
-            <a:off x="640080" y="1463040"/>
-            <a:ext cx="10972800" cy="4937760"/>
+            <a:off x="457200" y="868680"/>
+            <a:ext cx="11795760" cy="457200"/>
           </a:xfrm>
           <a:prstGeom prst="rect">
             <a:avLst/>
@@ -4983,6 +5267,749 @@
               </a:lnSpc>
             </a:pPr>
             <a:r>
+              <a:rPr sz="1500" b="0">
+                <a:solidFill>
+                  <a:srgbClr val="555555"/>
+                </a:solidFill>
+              </a:rPr>
+              <a:t>Profile-likelihood (template-fit) Asimov significance, with the IPC background shape &amp; normalisation taken as exactly known</a:t>
+            </a:r>
+          </a:p>
+        </p:txBody>
+      </p:sp>
+      <p:graphicFrame>
+        <p:nvGraphicFramePr>
+          <p:cNvPr id="5" name="Table 4"/>
+          <p:cNvGraphicFramePr>
+            <a:graphicFrameLocks noGrp="1"/>
+          </p:cNvGraphicFramePr>
+          <p:nvPr/>
+        </p:nvGraphicFramePr>
+        <p:xfrm>
+          <a:off x="457200" y="1371600"/>
+          <a:ext cx="11247118" cy="1325880"/>
+        </p:xfrm>
+        <a:graphic>
+          <a:graphicData uri="http://schemas.openxmlformats.org/drawingml/2006/table">
+            <a:tbl>
+              <a:tblPr firstRow="1" bandRow="1">
+                <a:tableStyleId>{5C22544A-7EE6-4342-B048-85BDC9FD1C3A}</a:tableStyleId>
+              </a:tblPr>
+              <a:tblGrid>
+                <a:gridCol w="3149193"/>
+                <a:gridCol w="2024481"/>
+                <a:gridCol w="2361895"/>
+                <a:gridCol w="1799539"/>
+                <a:gridCol w="1912010"/>
+              </a:tblGrid>
+              <a:tr h="441960">
+                <a:tc>
+                  <a:txBody>
+                    <a:bodyPr/>
+                    <a:lstStyle/>
+                    <a:p>
+                      <a:pPr algn="l"/>
+                      <a:r>
+                        <a:rPr sz="1250" b="1">
+                          <a:solidFill>
+                            <a:srgbClr val="FFFFFF"/>
+                          </a:solidFill>
+                        </a:rPr>
+                        <a:t>Scenario (30-day run)</a:t>
+                      </a:r>
+                    </a:p>
+                  </a:txBody>
+                  <a:tcPr marL="76200" marR="76200" marT="25400" marB="25400">
+                    <a:solidFill>
+                      <a:srgbClr val="1F3A5F"/>
+                    </a:solidFill>
+                  </a:tcPr>
+                </a:tc>
+                <a:tc>
+                  <a:txBody>
+                    <a:bodyPr/>
+                    <a:lstStyle/>
+                    <a:p>
+                      <a:pPr algn="ctr"/>
+                      <a:r>
+                        <a:rPr sz="1250" b="1">
+                          <a:solidFill>
+                            <a:srgbClr val="FFFFFF"/>
+                          </a:solidFill>
+                        </a:rPr>
+                        <a:t>Recorded  S / B</a:t>
+                      </a:r>
+                    </a:p>
+                  </a:txBody>
+                  <a:tcPr marL="76200" marR="76200" marT="25400" marB="25400">
+                    <a:solidFill>
+                      <a:srgbClr val="1F3A5F"/>
+                    </a:solidFill>
+                  </a:tcPr>
+                </a:tc>
+                <a:tc>
+                  <a:txBody>
+                    <a:bodyPr/>
+                    <a:lstStyle/>
+                    <a:p>
+                      <a:pPr algn="ctr"/>
+                      <a:r>
+                        <a:rPr sz="1250" b="1">
+                          <a:solidFill>
+                            <a:srgbClr val="FFFFFF"/>
+                          </a:solidFill>
+                        </a:rPr>
+                        <a:t>Shape-fit Z  (smeared, realistic)</a:t>
+                      </a:r>
+                    </a:p>
+                  </a:txBody>
+                  <a:tcPr marL="76200" marR="76200" marT="25400" marB="25400">
+                    <a:solidFill>
+                      <a:srgbClr val="1F3A5F"/>
+                    </a:solidFill>
+                  </a:tcPr>
+                </a:tc>
+                <a:tc>
+                  <a:txBody>
+                    <a:bodyPr/>
+                    <a:lstStyle/>
+                    <a:p>
+                      <a:pPr algn="ctr"/>
+                      <a:r>
+                        <a:rPr sz="1250" b="1">
+                          <a:solidFill>
+                            <a:srgbClr val="FFFFFF"/>
+                          </a:solidFill>
+                        </a:rPr>
+                        <a:t>Z if no smearing</a:t>
+                      </a:r>
+                    </a:p>
+                  </a:txBody>
+                  <a:tcPr marL="76200" marR="76200" marT="25400" marB="25400">
+                    <a:solidFill>
+                      <a:srgbClr val="1F3A5F"/>
+                    </a:solidFill>
+                  </a:tcPr>
+                </a:tc>
+                <a:tc>
+                  <a:txBody>
+                    <a:bodyPr/>
+                    <a:lstStyle/>
+                    <a:p>
+                      <a:pPr algn="ctr"/>
+                      <a:r>
+                        <a:rPr sz="1250" b="1">
+                          <a:solidFill>
+                            <a:srgbClr val="FFFFFF"/>
+                          </a:solidFill>
+                        </a:rPr>
+                        <a:t>Naïve S/√B  (whole spectrum)</a:t>
+                      </a:r>
+                    </a:p>
+                  </a:txBody>
+                  <a:tcPr marL="76200" marR="76200" marT="25400" marB="25400">
+                    <a:solidFill>
+                      <a:srgbClr val="1F3A5F"/>
+                    </a:solidFill>
+                  </a:tcPr>
+                </a:tc>
+              </a:tr>
+              <a:tr h="441960">
+                <a:tc>
+                  <a:txBody>
+                    <a:bodyPr/>
+                    <a:lstStyle/>
+                    <a:p>
+                      <a:pPr algn="l"/>
+                      <a:r>
+                        <a:rPr sz="1300" b="0">
+                          <a:solidFill>
+                            <a:srgbClr val="1F3A5F"/>
+                          </a:solidFill>
+                        </a:rPr>
+                        <a:t>July  ·  0.2–0.7 MeV</a:t>
+                      </a:r>
+                    </a:p>
+                  </a:txBody>
+                  <a:tcPr marL="76200" marR="76200" marT="25400" marB="25400">
+                    <a:solidFill>
+                      <a:srgbClr val="EEF2F7"/>
+                    </a:solidFill>
+                  </a:tcPr>
+                </a:tc>
+                <a:tc>
+                  <a:txBody>
+                    <a:bodyPr/>
+                    <a:lstStyle/>
+                    <a:p>
+                      <a:pPr algn="ctr"/>
+                      <a:r>
+                        <a:rPr sz="1300" b="0">
+                          <a:solidFill>
+                            <a:srgbClr val="1F3A5F"/>
+                          </a:solidFill>
+                        </a:rPr>
+                        <a:t>64 / 3 093</a:t>
+                      </a:r>
+                    </a:p>
+                  </a:txBody>
+                  <a:tcPr marL="76200" marR="76200" marT="25400" marB="25400">
+                    <a:solidFill>
+                      <a:srgbClr val="EEF2F7"/>
+                    </a:solidFill>
+                  </a:tcPr>
+                </a:tc>
+                <a:tc>
+                  <a:txBody>
+                    <a:bodyPr/>
+                    <a:lstStyle/>
+                    <a:p>
+                      <a:pPr algn="ctr"/>
+                      <a:r>
+                        <a:rPr sz="1300" b="0">
+                          <a:solidFill>
+                            <a:srgbClr val="1F3A5F"/>
+                          </a:solidFill>
+                        </a:rPr>
+                        <a:t>2.6 σ</a:t>
+                      </a:r>
+                    </a:p>
+                  </a:txBody>
+                  <a:tcPr marL="76200" marR="76200" marT="25400" marB="25400">
+                    <a:solidFill>
+                      <a:srgbClr val="EEF2F7"/>
+                    </a:solidFill>
+                  </a:tcPr>
+                </a:tc>
+                <a:tc>
+                  <a:txBody>
+                    <a:bodyPr/>
+                    <a:lstStyle/>
+                    <a:p>
+                      <a:pPr algn="ctr"/>
+                      <a:r>
+                        <a:rPr sz="1300" b="0">
+                          <a:solidFill>
+                            <a:srgbClr val="1F3A5F"/>
+                          </a:solidFill>
+                        </a:rPr>
+                        <a:t>3.9 σ</a:t>
+                      </a:r>
+                    </a:p>
+                  </a:txBody>
+                  <a:tcPr marL="76200" marR="76200" marT="25400" marB="25400">
+                    <a:solidFill>
+                      <a:srgbClr val="EEF2F7"/>
+                    </a:solidFill>
+                  </a:tcPr>
+                </a:tc>
+                <a:tc>
+                  <a:txBody>
+                    <a:bodyPr/>
+                    <a:lstStyle/>
+                    <a:p>
+                      <a:pPr algn="ctr"/>
+                      <a:r>
+                        <a:rPr sz="1300" b="0">
+                          <a:solidFill>
+                            <a:srgbClr val="1F3A5F"/>
+                          </a:solidFill>
+                        </a:rPr>
+                        <a:t>1.2</a:t>
+                      </a:r>
+                    </a:p>
+                  </a:txBody>
+                  <a:tcPr marL="76200" marR="76200" marT="25400" marB="25400">
+                    <a:solidFill>
+                      <a:srgbClr val="EEF2F7"/>
+                    </a:solidFill>
+                  </a:tcPr>
+                </a:tc>
+              </a:tr>
+              <a:tr h="441960">
+                <a:tc>
+                  <a:txBody>
+                    <a:bodyPr/>
+                    <a:lstStyle/>
+                    <a:p>
+                      <a:pPr algn="l"/>
+                      <a:r>
+                        <a:rPr sz="1300" b="0">
+                          <a:solidFill>
+                            <a:srgbClr val="1F3A5F"/>
+                          </a:solidFill>
+                        </a:rPr>
+                        <a:t>Post-LS3  ·  0.2–2 MeV</a:t>
+                      </a:r>
+                    </a:p>
+                  </a:txBody>
+                  <a:tcPr marL="76200" marR="76200" marT="25400" marB="25400">
+                    <a:solidFill>
+                      <a:srgbClr val="FFFFFF"/>
+                    </a:solidFill>
+                  </a:tcPr>
+                </a:tc>
+                <a:tc>
+                  <a:txBody>
+                    <a:bodyPr/>
+                    <a:lstStyle/>
+                    <a:p>
+                      <a:pPr algn="ctr"/>
+                      <a:r>
+                        <a:rPr sz="1300" b="0">
+                          <a:solidFill>
+                            <a:srgbClr val="1F3A5F"/>
+                          </a:solidFill>
+                        </a:rPr>
+                        <a:t>220 / 10 600</a:t>
+                      </a:r>
+                    </a:p>
+                  </a:txBody>
+                  <a:tcPr marL="76200" marR="76200" marT="25400" marB="25400">
+                    <a:solidFill>
+                      <a:srgbClr val="FFFFFF"/>
+                    </a:solidFill>
+                  </a:tcPr>
+                </a:tc>
+                <a:tc>
+                  <a:txBody>
+                    <a:bodyPr/>
+                    <a:lstStyle/>
+                    <a:p>
+                      <a:pPr algn="ctr"/>
+                      <a:r>
+                        <a:rPr sz="1300" b="0">
+                          <a:solidFill>
+                            <a:srgbClr val="1F3A5F"/>
+                          </a:solidFill>
+                        </a:rPr>
+                        <a:t>4.9 σ</a:t>
+                      </a:r>
+                    </a:p>
+                  </a:txBody>
+                  <a:tcPr marL="76200" marR="76200" marT="25400" marB="25400">
+                    <a:solidFill>
+                      <a:srgbClr val="FFFFFF"/>
+                    </a:solidFill>
+                  </a:tcPr>
+                </a:tc>
+                <a:tc>
+                  <a:txBody>
+                    <a:bodyPr/>
+                    <a:lstStyle/>
+                    <a:p>
+                      <a:pPr algn="ctr"/>
+                      <a:r>
+                        <a:rPr sz="1300" b="0">
+                          <a:solidFill>
+                            <a:srgbClr val="1F3A5F"/>
+                          </a:solidFill>
+                        </a:rPr>
+                        <a:t>7.3 σ</a:t>
+                      </a:r>
+                    </a:p>
+                  </a:txBody>
+                  <a:tcPr marL="76200" marR="76200" marT="25400" marB="25400">
+                    <a:solidFill>
+                      <a:srgbClr val="FFFFFF"/>
+                    </a:solidFill>
+                  </a:tcPr>
+                </a:tc>
+                <a:tc>
+                  <a:txBody>
+                    <a:bodyPr/>
+                    <a:lstStyle/>
+                    <a:p>
+                      <a:pPr algn="ctr"/>
+                      <a:r>
+                        <a:rPr sz="1300" b="0">
+                          <a:solidFill>
+                            <a:srgbClr val="1F3A5F"/>
+                          </a:solidFill>
+                        </a:rPr>
+                        <a:t>2.1</a:t>
+                      </a:r>
+                    </a:p>
+                  </a:txBody>
+                  <a:tcPr marL="76200" marR="76200" marT="25400" marB="25400">
+                    <a:solidFill>
+                      <a:srgbClr val="FFFFFF"/>
+                    </a:solidFill>
+                  </a:tcPr>
+                </a:tc>
+              </a:tr>
+            </a:tbl>
+          </a:graphicData>
+        </a:graphic>
+      </p:graphicFrame>
+      <p:sp>
+        <p:nvSpPr>
+          <p:cNvPr id="6" name="TextBox 5"/>
+          <p:cNvSpPr txBox="1"/>
+          <p:nvPr/>
+        </p:nvSpPr>
+        <p:spPr>
+          <a:xfrm>
+            <a:off x="457200" y="2788920"/>
+            <a:ext cx="5349240" cy="3749039"/>
+          </a:xfrm>
+          <a:prstGeom prst="rect">
+            <a:avLst/>
+          </a:prstGeom>
+          <a:noFill/>
+        </p:spPr>
+        <p:txBody>
+          <a:bodyPr wrap="square" anchor="t">
+            <a:spAutoFit/>
+          </a:bodyPr>
+          <a:lstStyle/>
+          <a:p>
+            <a:pPr algn="l">
+              <a:lnSpc>
+                <a:spcPct val="103000"/>
+              </a:lnSpc>
+            </a:pPr>
+            <a:r>
+              <a:rPr sz="1500" b="1">
+                <a:solidFill>
+                  <a:srgbClr val="1F3A5F"/>
+                </a:solidFill>
+              </a:rPr>
+              <a:t>What IS in these numbers</a:t>
+            </a:r>
+          </a:p>
+          <a:p>
+            <a:pPr algn="l">
+              <a:lnSpc>
+                <a:spcPct val="103000"/>
+              </a:lnSpc>
+            </a:pPr>
+            <a:r>
+              <a:rPr sz="1200" b="0">
+                <a:solidFill>
+                  <a:srgbClr val="555555"/>
+                </a:solidFill>
+              </a:rPr>
+              <a:t>Binned profile-likelihood ratio (Cowan et al. Asimov formula) — the rigorous form of “count in a region”, optimally weighted over all bins.</a:t>
+            </a:r>
+          </a:p>
+          <a:p>
+            <a:pPr algn="l">
+              <a:lnSpc>
+                <a:spcPct val="103000"/>
+              </a:lnSpc>
+            </a:pPr>
+            <a:r>
+              <a:rPr sz="1200" b="0">
+                <a:solidFill>
+                  <a:srgbClr val="555555"/>
+                </a:solidFill>
+              </a:rPr>
+              <a:t>Same templates as slides 4–5: best-estimator (target-centre chord) capsule multiple-scattering smearing; α_IPC = 3.5×10⁻³, X17/IPC = 2.5%, MM-double acceptance.</a:t>
+            </a:r>
+          </a:p>
+          <a:p>
+            <a:pPr algn="l">
+              <a:lnSpc>
+                <a:spcPct val="103000"/>
+              </a:lnSpc>
+            </a:pPr>
+            <a:r>
+              <a:rPr sz="1200" b="0">
+                <a:solidFill>
+                  <a:srgbClr val="555555"/>
+                </a:solidFill>
+              </a:rPr>
+              <a:t>Binning-independent: 2° and 8° (×4) bins agree to &lt;1%.</a:t>
+            </a:r>
+          </a:p>
+          <a:p>
+            <a:pPr algn="l">
+              <a:lnSpc>
+                <a:spcPct val="103000"/>
+              </a:lnSpc>
+            </a:pPr>
+            <a:r>
+              <a:rPr sz="1200" b="0">
+                <a:solidFill>
+                  <a:srgbClr val="555555"/>
+                </a:solidFill>
+              </a:rPr>
+              <a:t>Background normalisation can be floated from the θ ≲ 90° region (X17-free) to ~2% — negligible. The shape fit ~doubles the naïve whole-spectrum S/√B by weighting the high-θ shoulder.</a:t>
+            </a:r>
+          </a:p>
+        </p:txBody>
+      </p:sp>
+      <p:sp>
+        <p:nvSpPr>
+          <p:cNvPr id="7" name="Rectangle 6"/>
+          <p:cNvSpPr/>
+          <p:nvPr/>
+        </p:nvSpPr>
+        <p:spPr>
+          <a:xfrm>
+            <a:off x="5989320" y="2788920"/>
+            <a:ext cx="5742432" cy="3749039"/>
+          </a:xfrm>
+          <a:prstGeom prst="rect">
+            <a:avLst/>
+          </a:prstGeom>
+          <a:solidFill>
+            <a:srgbClr val="FDE8E8"/>
+          </a:solidFill>
+          <a:ln w="22225">
+            <a:solidFill>
+              <a:srgbClr val="C03030"/>
+            </a:solidFill>
+          </a:ln>
+        </p:spPr>
+        <p:style>
+          <a:lnRef idx="1">
+            <a:schemeClr val="accent1"/>
+          </a:lnRef>
+          <a:fillRef idx="3">
+            <a:schemeClr val="accent1"/>
+          </a:fillRef>
+          <a:effectRef idx="2">
+            <a:schemeClr val="accent1"/>
+          </a:effectRef>
+          <a:fontRef idx="minor">
+            <a:schemeClr val="lt1"/>
+          </a:fontRef>
+        </p:style>
+        <p:txBody>
+          <a:bodyPr rtlCol="0" anchor="ctr" wrap="square" lIns="114300" rIns="114300" tIns="76200"/>
+          <a:lstStyle/>
+          <a:p>
+            <a:pPr algn="ctr"/>
+            <a:r>
+              <a:rPr sz="1250" b="1">
+                <a:solidFill>
+                  <a:srgbClr val="B02020"/>
+                </a:solidFill>
+              </a:rPr>
+              <a:t>⚠  Why this is a ceiling, not a confidence level  (keep this box)</a:t>
+            </a:r>
+          </a:p>
+          <a:p>
+            <a:pPr>
+              <a:lnSpc>
+                <a:spcPct val="100000"/>
+              </a:lnSpc>
+              <a:spcBef>
+                <a:spcPts val="300"/>
+              </a:spcBef>
+            </a:pPr>
+            <a:r>
+              <a:rPr sz="1150">
+                <a:solidFill>
+                  <a:srgbClr val="5A1010"/>
+                </a:solidFill>
+              </a:rPr>
+              <a:t>•  The IPC angular SHAPE is assumed equal to the simulation truth; its uncertainty — which will dominate the real CL — is NOT propagated.</a:t>
+            </a:r>
+          </a:p>
+          <a:p>
+            <a:pPr>
+              <a:lnSpc>
+                <a:spcPct val="100000"/>
+              </a:lnSpc>
+              <a:spcBef>
+                <a:spcPts val="300"/>
+              </a:spcBef>
+            </a:pPr>
+            <a:r>
+              <a:rPr sz="1150">
+                <a:solidFill>
+                  <a:srgbClr val="5A1010"/>
+                </a:solidFill>
+              </a:rPr>
+              <a:t>•  Physics: a single E1 transition is assumed (probably fair, unquantified here).</a:t>
+            </a:r>
+          </a:p>
+          <a:p>
+            <a:pPr>
+              <a:lnSpc>
+                <a:spcPct val="100000"/>
+              </a:lnSpc>
+              <a:spcBef>
+                <a:spcPts val="300"/>
+              </a:spcBef>
+            </a:pPr>
+            <a:r>
+              <a:rPr sz="1150">
+                <a:solidFill>
+                  <a:srgbClr val="5A1010"/>
+                </a:solidFill>
+              </a:rPr>
+              <a:t>•  Detector/acceptance shape distortion is omitted: poor separation of near-collinear tracks (small θ), and finite active area shaping the catch probability for wide-angle pairs (large θ) — the signal region.</a:t>
+            </a:r>
+          </a:p>
+          <a:p>
+            <a:pPr>
+              <a:lnSpc>
+                <a:spcPct val="100000"/>
+              </a:lnSpc>
+              <a:spcBef>
+                <a:spcPts val="300"/>
+              </a:spcBef>
+            </a:pPr>
+            <a:r>
+              <a:rPr sz="1150">
+                <a:solidFill>
+                  <a:srgbClr val="5A1010"/>
+                </a:solidFill>
+              </a:rPr>
+              <a:t>•  With B ≈ 3 000–10 000, a few-% shape error in the high-θ signal region already rivals the statistical fluctuation — by post-LS3 the IPC shape, not statistics, sets the achievable CL.</a:t>
+            </a:r>
+          </a:p>
+          <a:p>
+            <a:pPr>
+              <a:lnSpc>
+                <a:spcPct val="100000"/>
+              </a:lnSpc>
+              <a:spcBef>
+                <a:spcPts val="300"/>
+              </a:spcBef>
+            </a:pPr>
+            <a:r>
+              <a:rPr sz="1150">
+                <a:solidFill>
+                  <a:srgbClr val="5A1010"/>
+                </a:solidFill>
+              </a:rPr>
+              <a:t>•  Read 2.6σ / 4.9σ as a best-case ceiling. A defensible CL needs the MEASURED IPC shape + full detector response folded in (open work).</a:t>
+            </a:r>
+          </a:p>
+        </p:txBody>
+      </p:sp>
+    </p:spTree>
+  </p:cSld>
+  <p:clrMapOvr>
+    <a:masterClrMapping/>
+  </p:clrMapOvr>
+</p:sld>
+</file>
+
+<file path=ppt/slides/slide13.xml><?xml version="1.0" encoding="utf-8"?>
+<p:sld xmlns:a="http://schemas.openxmlformats.org/drawingml/2006/main" xmlns:p="http://schemas.openxmlformats.org/presentationml/2006/main" xmlns:r="http://schemas.openxmlformats.org/officeDocument/2006/relationships">
+  <p:cSld>
+    <p:spTree>
+      <p:nvGrpSpPr>
+        <p:cNvPr id="1" name=""/>
+        <p:cNvGrpSpPr/>
+        <p:nvPr/>
+      </p:nvGrpSpPr>
+      <p:grpSpPr/>
+      <p:sp>
+        <p:nvSpPr>
+          <p:cNvPr id="2" name="Rectangle 1"/>
+          <p:cNvSpPr/>
+          <p:nvPr/>
+        </p:nvSpPr>
+        <p:spPr>
+          <a:xfrm>
+            <a:off x="0" y="0"/>
+            <a:ext cx="12191695" cy="109728"/>
+          </a:xfrm>
+          <a:prstGeom prst="rect">
+            <a:avLst/>
+          </a:prstGeom>
+          <a:solidFill>
+            <a:srgbClr val="1F3A5F"/>
+          </a:solidFill>
+          <a:ln>
+            <a:noFill/>
+          </a:ln>
+        </p:spPr>
+        <p:style>
+          <a:lnRef idx="1">
+            <a:schemeClr val="accent1"/>
+          </a:lnRef>
+          <a:fillRef idx="3">
+            <a:schemeClr val="accent1"/>
+          </a:fillRef>
+          <a:effectRef idx="2">
+            <a:schemeClr val="accent1"/>
+          </a:effectRef>
+          <a:fontRef idx="minor">
+            <a:schemeClr val="lt1"/>
+          </a:fontRef>
+        </p:style>
+        <p:txBody>
+          <a:bodyPr rtlCol="0" anchor="ctr"/>
+          <a:lstStyle/>
+          <a:p>
+            <a:pPr algn="ctr"/>
+          </a:p>
+        </p:txBody>
+      </p:sp>
+      <p:sp>
+        <p:nvSpPr>
+          <p:cNvPr id="3" name="TextBox 2"/>
+          <p:cNvSpPr txBox="1"/>
+          <p:nvPr/>
+        </p:nvSpPr>
+        <p:spPr>
+          <a:xfrm>
+            <a:off x="457200" y="201168"/>
+            <a:ext cx="11795760" cy="640080"/>
+          </a:xfrm>
+          <a:prstGeom prst="rect">
+            <a:avLst/>
+          </a:prstGeom>
+          <a:noFill/>
+        </p:spPr>
+        <p:txBody>
+          <a:bodyPr wrap="square" anchor="t">
+            <a:spAutoFit/>
+          </a:bodyPr>
+          <a:lstStyle/>
+          <a:p>
+            <a:pPr algn="l">
+              <a:lnSpc>
+                <a:spcPct val="105000"/>
+              </a:lnSpc>
+            </a:pPr>
+            <a:r>
+              <a:rPr sz="2600" b="1">
+                <a:solidFill>
+                  <a:srgbClr val="1F3A5F"/>
+                </a:solidFill>
+              </a:rPr>
+              <a:t>Summary &amp; status</a:t>
+            </a:r>
+          </a:p>
+        </p:txBody>
+      </p:sp>
+      <p:sp>
+        <p:nvSpPr>
+          <p:cNvPr id="4" name="TextBox 3"/>
+          <p:cNvSpPr txBox="1"/>
+          <p:nvPr/>
+        </p:nvSpPr>
+        <p:spPr>
+          <a:xfrm>
+            <a:off x="640080" y="1463040"/>
+            <a:ext cx="10972800" cy="4937760"/>
+          </a:xfrm>
+          <a:prstGeom prst="rect">
+            <a:avLst/>
+          </a:prstGeom>
+          <a:noFill/>
+        </p:spPr>
+        <p:txBody>
+          <a:bodyPr wrap="square" anchor="t">
+            <a:spAutoFit/>
+          </a:bodyPr>
+          <a:lstStyle/>
+          <a:p>
+            <a:pPr algn="l">
+              <a:lnSpc>
+                <a:spcPct val="105000"/>
+              </a:lnSpc>
+            </a:pPr>
+            <a:r>
               <a:rPr sz="2000" b="1">
                 <a:solidFill>
                   <a:srgbClr val="1F3A5F"/>
@@ -5136,6 +6163,604 @@
                 </a:solidFill>
               </a:rPr>
               <a:t>α_IPC &amp; X17/IPC provenance (Alberto); Eₙ-dependent generator kinematics; the template-fit significance projection; γ-flash recovery measurement.</a:t>
+            </a:r>
+          </a:p>
+        </p:txBody>
+      </p:sp>
+    </p:spTree>
+  </p:cSld>
+  <p:clrMapOvr>
+    <a:masterClrMapping/>
+  </p:clrMapOvr>
+</p:sld>
+</file>
+
+<file path=ppt/slides/slide14.xml><?xml version="1.0" encoding="utf-8"?>
+<p:sld xmlns:a="http://schemas.openxmlformats.org/drawingml/2006/main" xmlns:p="http://schemas.openxmlformats.org/presentationml/2006/main" xmlns:r="http://schemas.openxmlformats.org/officeDocument/2006/relationships">
+  <p:cSld>
+    <p:spTree>
+      <p:nvGrpSpPr>
+        <p:cNvPr id="1" name=""/>
+        <p:cNvGrpSpPr/>
+        <p:nvPr/>
+      </p:nvGrpSpPr>
+      <p:grpSpPr/>
+      <p:sp>
+        <p:nvSpPr>
+          <p:cNvPr id="2" name="Rectangle 1"/>
+          <p:cNvSpPr/>
+          <p:nvPr/>
+        </p:nvSpPr>
+        <p:spPr>
+          <a:xfrm>
+            <a:off x="0" y="2743200"/>
+            <a:ext cx="12191695" cy="1371600"/>
+          </a:xfrm>
+          <a:prstGeom prst="rect">
+            <a:avLst/>
+          </a:prstGeom>
+          <a:solidFill>
+            <a:srgbClr val="1F3A5F"/>
+          </a:solidFill>
+          <a:ln>
+            <a:noFill/>
+          </a:ln>
+        </p:spPr>
+        <p:style>
+          <a:lnRef idx="1">
+            <a:schemeClr val="accent1"/>
+          </a:lnRef>
+          <a:fillRef idx="3">
+            <a:schemeClr val="accent1"/>
+          </a:fillRef>
+          <a:effectRef idx="2">
+            <a:schemeClr val="accent1"/>
+          </a:effectRef>
+          <a:fontRef idx="minor">
+            <a:schemeClr val="lt1"/>
+          </a:fontRef>
+        </p:style>
+        <p:txBody>
+          <a:bodyPr rtlCol="0" anchor="ctr"/>
+          <a:lstStyle/>
+          <a:p>
+            <a:pPr algn="ctr"/>
+          </a:p>
+        </p:txBody>
+      </p:sp>
+      <p:sp>
+        <p:nvSpPr>
+          <p:cNvPr id="3" name="TextBox 2"/>
+          <p:cNvSpPr txBox="1"/>
+          <p:nvPr/>
+        </p:nvSpPr>
+        <p:spPr>
+          <a:xfrm>
+            <a:off x="731520" y="2971800"/>
+            <a:ext cx="10698480" cy="914400"/>
+          </a:xfrm>
+          <a:prstGeom prst="rect">
+            <a:avLst/>
+          </a:prstGeom>
+          <a:noFill/>
+        </p:spPr>
+        <p:txBody>
+          <a:bodyPr wrap="square" anchor="t">
+            <a:spAutoFit/>
+          </a:bodyPr>
+          <a:lstStyle/>
+          <a:p>
+            <a:pPr algn="l">
+              <a:lnSpc>
+                <a:spcPct val="105000"/>
+              </a:lnSpc>
+            </a:pPr>
+            <a:r>
+              <a:rPr sz="3400" b="1">
+                <a:solidFill>
+                  <a:srgbClr val="FFFFFF"/>
+                </a:solidFill>
+              </a:rPr>
+              <a:t>Backup: factor-4 rebinned spectra</a:t>
+            </a:r>
+          </a:p>
+        </p:txBody>
+      </p:sp>
+      <p:sp>
+        <p:nvSpPr>
+          <p:cNvPr id="4" name="TextBox 3"/>
+          <p:cNvSpPr txBox="1"/>
+          <p:nvPr/>
+        </p:nvSpPr>
+        <p:spPr>
+          <a:xfrm>
+            <a:off x="731520" y="4297680"/>
+            <a:ext cx="10698480" cy="640080"/>
+          </a:xfrm>
+          <a:prstGeom prst="rect">
+            <a:avLst/>
+          </a:prstGeom>
+          <a:noFill/>
+        </p:spPr>
+        <p:txBody>
+          <a:bodyPr wrap="square" anchor="t">
+            <a:spAutoFit/>
+          </a:bodyPr>
+          <a:lstStyle/>
+          <a:p>
+            <a:pPr algn="l">
+              <a:lnSpc>
+                <a:spcPct val="105000"/>
+              </a:lnSpc>
+            </a:pPr>
+            <a:r>
+              <a:rPr sz="1600" b="0">
+                <a:solidFill>
+                  <a:srgbClr val="555555"/>
+                </a:solidFill>
+              </a:rPr>
+              <a:t>The slides 4–5 stacked spectra with 4 base bins merged into one (2° → 8° opening-angle bins) — same events, coarser binning.</a:t>
+            </a:r>
+          </a:p>
+        </p:txBody>
+      </p:sp>
+    </p:spTree>
+  </p:cSld>
+  <p:clrMapOvr>
+    <a:masterClrMapping/>
+  </p:clrMapOvr>
+</p:sld>
+</file>
+
+<file path=ppt/slides/slide15.xml><?xml version="1.0" encoding="utf-8"?>
+<p:sld xmlns:a="http://schemas.openxmlformats.org/drawingml/2006/main" xmlns:p="http://schemas.openxmlformats.org/presentationml/2006/main" xmlns:r="http://schemas.openxmlformats.org/officeDocument/2006/relationships">
+  <p:cSld>
+    <p:spTree>
+      <p:nvGrpSpPr>
+        <p:cNvPr id="1" name=""/>
+        <p:cNvGrpSpPr/>
+        <p:nvPr/>
+      </p:nvGrpSpPr>
+      <p:grpSpPr/>
+      <p:sp>
+        <p:nvSpPr>
+          <p:cNvPr id="2" name="Rectangle 1"/>
+          <p:cNvSpPr/>
+          <p:nvPr/>
+        </p:nvSpPr>
+        <p:spPr>
+          <a:xfrm>
+            <a:off x="0" y="0"/>
+            <a:ext cx="12191695" cy="109728"/>
+          </a:xfrm>
+          <a:prstGeom prst="rect">
+            <a:avLst/>
+          </a:prstGeom>
+          <a:solidFill>
+            <a:srgbClr val="1F3A5F"/>
+          </a:solidFill>
+          <a:ln>
+            <a:noFill/>
+          </a:ln>
+        </p:spPr>
+        <p:style>
+          <a:lnRef idx="1">
+            <a:schemeClr val="accent1"/>
+          </a:lnRef>
+          <a:fillRef idx="3">
+            <a:schemeClr val="accent1"/>
+          </a:fillRef>
+          <a:effectRef idx="2">
+            <a:schemeClr val="accent1"/>
+          </a:effectRef>
+          <a:fontRef idx="minor">
+            <a:schemeClr val="lt1"/>
+          </a:fontRef>
+        </p:style>
+        <p:txBody>
+          <a:bodyPr rtlCol="0" anchor="ctr"/>
+          <a:lstStyle/>
+          <a:p>
+            <a:pPr algn="ctr"/>
+          </a:p>
+        </p:txBody>
+      </p:sp>
+      <p:sp>
+        <p:nvSpPr>
+          <p:cNvPr id="3" name="TextBox 2"/>
+          <p:cNvSpPr txBox="1"/>
+          <p:nvPr/>
+        </p:nvSpPr>
+        <p:spPr>
+          <a:xfrm>
+            <a:off x="457200" y="201168"/>
+            <a:ext cx="11795760" cy="640080"/>
+          </a:xfrm>
+          <a:prstGeom prst="rect">
+            <a:avLst/>
+          </a:prstGeom>
+          <a:noFill/>
+        </p:spPr>
+        <p:txBody>
+          <a:bodyPr wrap="square" anchor="t">
+            <a:spAutoFit/>
+          </a:bodyPr>
+          <a:lstStyle/>
+          <a:p>
+            <a:pPr algn="l">
+              <a:lnSpc>
+                <a:spcPct val="105000"/>
+              </a:lnSpc>
+            </a:pPr>
+            <a:r>
+              <a:rPr sz="2600" b="1">
+                <a:solidFill>
+                  <a:srgbClr val="1F3A5F"/>
+                </a:solidFill>
+              </a:rPr>
+              <a:t>July run, rebinned ×4 (8° bins)</a:t>
+            </a:r>
+          </a:p>
+        </p:txBody>
+      </p:sp>
+      <p:sp>
+        <p:nvSpPr>
+          <p:cNvPr id="4" name="TextBox 3"/>
+          <p:cNvSpPr txBox="1"/>
+          <p:nvPr/>
+        </p:nvSpPr>
+        <p:spPr>
+          <a:xfrm>
+            <a:off x="457200" y="868680"/>
+            <a:ext cx="11795760" cy="457200"/>
+          </a:xfrm>
+          <a:prstGeom prst="rect">
+            <a:avLst/>
+          </a:prstGeom>
+          <a:noFill/>
+        </p:spPr>
+        <p:txBody>
+          <a:bodyPr wrap="square" anchor="t">
+            <a:spAutoFit/>
+          </a:bodyPr>
+          <a:lstStyle/>
+          <a:p>
+            <a:pPr algn="l">
+              <a:lnSpc>
+                <a:spcPct val="105000"/>
+              </a:lnSpc>
+            </a:pPr>
+            <a:r>
+              <a:rPr sz="1500" b="0">
+                <a:solidFill>
+                  <a:srgbClr val="555555"/>
+                </a:solidFill>
+              </a:rPr>
+              <a:t>Same as slide 4 — window 0.2–0.7 MeV, 30-day run — with 4 base bins merged into one</a:t>
+            </a:r>
+          </a:p>
+        </p:txBody>
+      </p:sp>
+      <p:pic>
+        <p:nvPicPr>
+          <p:cNvPr id="5" name="Picture 4" descr="fig_stacked_july_rebin4.png"/>
+          <p:cNvPicPr>
+            <a:picLocks noChangeAspect="1"/>
+          </p:cNvPicPr>
+          <p:nvPr/>
+        </p:nvPicPr>
+        <p:blipFill>
+          <a:blip r:embed="rId2"/>
+          <a:stretch>
+            <a:fillRect/>
+          </a:stretch>
+        </p:blipFill>
+        <p:spPr>
+          <a:xfrm>
+            <a:off x="656409" y="1371600"/>
+            <a:ext cx="6459582" cy="4206240"/>
+          </a:xfrm>
+          <a:prstGeom prst="rect">
+            <a:avLst/>
+          </a:prstGeom>
+        </p:spPr>
+      </p:pic>
+      <p:sp>
+        <p:nvSpPr>
+          <p:cNvPr id="6" name="TextBox 5"/>
+          <p:cNvSpPr txBox="1"/>
+          <p:nvPr/>
+        </p:nvSpPr>
+        <p:spPr>
+          <a:xfrm>
+            <a:off x="7680960" y="1463040"/>
+            <a:ext cx="4297680" cy="4206240"/>
+          </a:xfrm>
+          <a:prstGeom prst="rect">
+            <a:avLst/>
+          </a:prstGeom>
+          <a:noFill/>
+        </p:spPr>
+        <p:txBody>
+          <a:bodyPr wrap="square" anchor="t">
+            <a:spAutoFit/>
+          </a:bodyPr>
+          <a:lstStyle/>
+          <a:p>
+            <a:pPr algn="l">
+              <a:lnSpc>
+                <a:spcPct val="105000"/>
+              </a:lnSpc>
+            </a:pPr>
+            <a:r>
+              <a:rPr sz="2000" b="1">
+                <a:solidFill>
+                  <a:srgbClr val="1F3A5F"/>
+                </a:solidFill>
+              </a:rPr>
+              <a:t>≈ 64 X17 on ≈ 3 100 IPC</a:t>
+            </a:r>
+          </a:p>
+          <a:p>
+            <a:pPr algn="l">
+              <a:lnSpc>
+                <a:spcPct val="105000"/>
+              </a:lnSpc>
+            </a:pPr>
+            <a:r>
+              <a:rPr sz="1400" b="0">
+                <a:solidFill>
+                  <a:srgbClr val="555555"/>
+                </a:solidFill>
+              </a:rPr>
+              <a:t>recorded in 30 days (S/B ≈ 0.021) — yields unchanged from slide 4.</a:t>
+            </a:r>
+          </a:p>
+          <a:p>
+            <a:pPr algn="l">
+              <a:lnSpc>
+                <a:spcPct val="105000"/>
+              </a:lnSpc>
+              <a:spcBef>
+                <a:spcPts val="800"/>
+              </a:spcBef>
+            </a:pPr>
+            <a:r>
+              <a:rPr sz="1500" b="1">
+                <a:solidFill>
+                  <a:srgbClr val="B02020"/>
+                </a:solidFill>
+              </a:rPr>
+              <a:t>Coarser binning, same statistics.</a:t>
+            </a:r>
+          </a:p>
+          <a:p>
+            <a:pPr algn="l">
+              <a:lnSpc>
+                <a:spcPct val="105000"/>
+              </a:lnSpc>
+            </a:pPr>
+            <a:r>
+              <a:rPr sz="1400" b="0">
+                <a:solidFill>
+                  <a:srgbClr val="555555"/>
+                </a:solidFill>
+              </a:rPr>
+              <a:t>Merging 4 base bins (2° → 8°) smooths the per-bin fluctuations and makes the smeared 109° excess (red, over green-dotted truth) easier to read by eye — but it adds no information. Significance is set by the template fit, which is binning-independent.</a:t>
+            </a:r>
+          </a:p>
+        </p:txBody>
+      </p:sp>
+    </p:spTree>
+  </p:cSld>
+  <p:clrMapOvr>
+    <a:masterClrMapping/>
+  </p:clrMapOvr>
+</p:sld>
+</file>
+
+<file path=ppt/slides/slide16.xml><?xml version="1.0" encoding="utf-8"?>
+<p:sld xmlns:a="http://schemas.openxmlformats.org/drawingml/2006/main" xmlns:p="http://schemas.openxmlformats.org/presentationml/2006/main" xmlns:r="http://schemas.openxmlformats.org/officeDocument/2006/relationships">
+  <p:cSld>
+    <p:spTree>
+      <p:nvGrpSpPr>
+        <p:cNvPr id="1" name=""/>
+        <p:cNvGrpSpPr/>
+        <p:nvPr/>
+      </p:nvGrpSpPr>
+      <p:grpSpPr/>
+      <p:sp>
+        <p:nvSpPr>
+          <p:cNvPr id="2" name="Rectangle 1"/>
+          <p:cNvSpPr/>
+          <p:nvPr/>
+        </p:nvSpPr>
+        <p:spPr>
+          <a:xfrm>
+            <a:off x="0" y="0"/>
+            <a:ext cx="12191695" cy="109728"/>
+          </a:xfrm>
+          <a:prstGeom prst="rect">
+            <a:avLst/>
+          </a:prstGeom>
+          <a:solidFill>
+            <a:srgbClr val="1F3A5F"/>
+          </a:solidFill>
+          <a:ln>
+            <a:noFill/>
+          </a:ln>
+        </p:spPr>
+        <p:style>
+          <a:lnRef idx="1">
+            <a:schemeClr val="accent1"/>
+          </a:lnRef>
+          <a:fillRef idx="3">
+            <a:schemeClr val="accent1"/>
+          </a:fillRef>
+          <a:effectRef idx="2">
+            <a:schemeClr val="accent1"/>
+          </a:effectRef>
+          <a:fontRef idx="minor">
+            <a:schemeClr val="lt1"/>
+          </a:fontRef>
+        </p:style>
+        <p:txBody>
+          <a:bodyPr rtlCol="0" anchor="ctr"/>
+          <a:lstStyle/>
+          <a:p>
+            <a:pPr algn="ctr"/>
+          </a:p>
+        </p:txBody>
+      </p:sp>
+      <p:sp>
+        <p:nvSpPr>
+          <p:cNvPr id="3" name="TextBox 2"/>
+          <p:cNvSpPr txBox="1"/>
+          <p:nvPr/>
+        </p:nvSpPr>
+        <p:spPr>
+          <a:xfrm>
+            <a:off x="457200" y="201168"/>
+            <a:ext cx="11795760" cy="640080"/>
+          </a:xfrm>
+          <a:prstGeom prst="rect">
+            <a:avLst/>
+          </a:prstGeom>
+          <a:noFill/>
+        </p:spPr>
+        <p:txBody>
+          <a:bodyPr wrap="square" anchor="t">
+            <a:spAutoFit/>
+          </a:bodyPr>
+          <a:lstStyle/>
+          <a:p>
+            <a:pPr algn="l">
+              <a:lnSpc>
+                <a:spcPct val="105000"/>
+              </a:lnSpc>
+            </a:pPr>
+            <a:r>
+              <a:rPr sz="2600" b="1">
+                <a:solidFill>
+                  <a:srgbClr val="1F3A5F"/>
+                </a:solidFill>
+              </a:rPr>
+              <a:t>July vs post-LS3, rebinned ×4 (8° bins)</a:t>
+            </a:r>
+          </a:p>
+        </p:txBody>
+      </p:sp>
+      <p:sp>
+        <p:nvSpPr>
+          <p:cNvPr id="4" name="TextBox 3"/>
+          <p:cNvSpPr txBox="1"/>
+          <p:nvPr/>
+        </p:nvSpPr>
+        <p:spPr>
+          <a:xfrm>
+            <a:off x="457200" y="868680"/>
+            <a:ext cx="11795760" cy="457200"/>
+          </a:xfrm>
+          <a:prstGeom prst="rect">
+            <a:avLst/>
+          </a:prstGeom>
+          <a:noFill/>
+        </p:spPr>
+        <p:txBody>
+          <a:bodyPr wrap="square" anchor="t">
+            <a:spAutoFit/>
+          </a:bodyPr>
+          <a:lstStyle/>
+          <a:p>
+            <a:pPr algn="l">
+              <a:lnSpc>
+                <a:spcPct val="105000"/>
+              </a:lnSpc>
+            </a:pPr>
+            <a:r>
+              <a:rPr sz="1500" b="0">
+                <a:solidFill>
+                  <a:srgbClr val="555555"/>
+                </a:solidFill>
+              </a:rPr>
+              <a:t>Same as slide 5 — the two windows side by side — with 4 base bins merged into one</a:t>
+            </a:r>
+          </a:p>
+        </p:txBody>
+      </p:sp>
+      <p:pic>
+        <p:nvPicPr>
+          <p:cNvPr id="5" name="Picture 4" descr="fig_stacked_compare_rebin4.png"/>
+          <p:cNvPicPr>
+            <a:picLocks noChangeAspect="1"/>
+          </p:cNvPicPr>
+          <p:nvPr/>
+        </p:nvPicPr>
+        <p:blipFill>
+          <a:blip r:embed="rId2"/>
+          <a:stretch>
+            <a:fillRect/>
+          </a:stretch>
+        </p:blipFill>
+        <p:spPr>
+          <a:xfrm>
+            <a:off x="423913" y="1463040"/>
+            <a:ext cx="11313694" cy="4160520"/>
+          </a:xfrm>
+          <a:prstGeom prst="rect">
+            <a:avLst/>
+          </a:prstGeom>
+        </p:spPr>
+      </p:pic>
+      <p:sp>
+        <p:nvSpPr>
+          <p:cNvPr id="6" name="TextBox 5"/>
+          <p:cNvSpPr txBox="1"/>
+          <p:nvPr/>
+        </p:nvSpPr>
+        <p:spPr>
+          <a:xfrm>
+            <a:off x="457200" y="5669280"/>
+            <a:ext cx="11338560" cy="1005840"/>
+          </a:xfrm>
+          <a:prstGeom prst="rect">
+            <a:avLst/>
+          </a:prstGeom>
+          <a:noFill/>
+        </p:spPr>
+        <p:txBody>
+          <a:bodyPr wrap="square" anchor="t">
+            <a:spAutoFit/>
+          </a:bodyPr>
+          <a:lstStyle/>
+          <a:p>
+            <a:pPr algn="l">
+              <a:lnSpc>
+                <a:spcPct val="105000"/>
+              </a:lnSpc>
+            </a:pPr>
+            <a:r>
+              <a:rPr sz="1700" b="1">
+                <a:solidFill>
+                  <a:srgbClr val="1F3A5F"/>
+                </a:solidFill>
+              </a:rPr>
+              <a:t>July 64 X17 → post-LS3 220 X17 recorded (30 d), same S/B ≈ 0.021.</a:t>
+            </a:r>
+          </a:p>
+          <a:p>
+            <a:pPr algn="l">
+              <a:lnSpc>
+                <a:spcPct val="105000"/>
+              </a:lnSpc>
+            </a:pPr>
+            <a:r>
+              <a:rPr sz="1400" b="0">
+                <a:solidFill>
+                  <a:srgbClr val="555555"/>
+                </a:solidFill>
+              </a:rPr>
+              <a:t>Rebinned ×4 (2° → 8°) for readability; the shape and yields are identical to slide 5. The post-LS3 gain is purely statistical.</a:t>
             </a:r>
           </a:p>
         </p:txBody>

--- a/docs/slides/MX17_results.pptx
+++ b/docs/slides/MX17_results.pptx
@@ -867,7 +867,7 @@
           <a:lstStyle/>
           <a:p>
             <a:r>
-              <a:t>Backup rebinned (x4) twin of slide 4. Same recorded yields (64 X17 / 3093 IPC, S/B 0.021); only the display binning is coarser. Use to answer the collaborator's rebinning request; do not read a confidence level off the binning -- that comes from the template-fit / counting analysis (see notes).</a:t>
+              <a:t>Backup rebinned (x4) twin of slide 4. Same recorded yields (91 X17 / 3592 IPC, S/B 0.025); only the display binning is coarser. Use to answer the collaborator's rebinning request; do not read a confidence level off the binning -- that comes from the template-fit / counting analysis (see notes).</a:t>
             </a:r>
           </a:p>
         </p:txBody>
@@ -1147,7 +1147,7 @@
           <a:lstStyle/>
           <a:p>
             <a:r>
-              <a:t>Conservative July choice: gamma-flash recovery only by ~1.7 us, so max neutron energy ~0.7 MeV (this 'energy cutoff' framing is how the collaboration thinks). 143 captures in the window -&gt; 64 recorded X17 / 3093 IPC over 30 days at alpha=3.5e-3. The caveat box is a separate shape: delete it for the INFN talk if desired. Figure: scripts/make_slides_figures.py.</a:t>
+              <a:t>Conservative July choice: gamma-flash recovery only by ~1.7 us, so max neutron energy ~0.7 MeV (this 'energy cutoff' framing is how the collaboration thinks). 143 captures in the window -&gt; 91 recorded X17 (nose-first acc.) / 3592 IPC over 30 days at alpha=3.5e-3 (nose-first acceptance). The caveat box is a separate shape: delete it for the INFN talk if desired. Figure: scripts/make_slides_figures.py.</a:t>
             </a:r>
           </a:p>
         </p:txBody>
@@ -1217,7 +1217,7 @@
           <a:lstStyle/>
           <a:p>
             <a:r>
-              <a:t>LS3 goal stated by the collaboration: achieve neutron energy of at least 2 MeV. Same plot as July, window extended 0.7-&gt;2 MeV. Recorded X17 30 d: 220 vs 64 (x3.4). S/B identical (set by X17/IPC branching x acceptance ratio, window-independent). The decisive question remains the gamma-flash recovery time, measured on the real setup.</a:t>
+              <a:t>LS3 goal stated by the collaboration: achieve neutron energy of at least 2 MeV. Same plot as July, window extended 0.7-&gt;2 MeV. Recorded X17 30 d: 312 vs 91 (x3.4). S/B identical (set by X17/IPC branching x acceptance ratio, window-independent). The decisive question remains the gamma-flash recovery time, measured on the real setup.</a:t>
             </a:r>
           </a:p>
         </p:txBody>
@@ -5449,7 +5449,7 @@
                             <a:srgbClr val="1F3A5F"/>
                           </a:solidFill>
                         </a:rPr>
-                        <a:t>64 / 3 093</a:t>
+                        <a:t>91 / 3 592</a:t>
                       </a:r>
                     </a:p>
                   </a:txBody>
@@ -5471,7 +5471,7 @@
                             <a:srgbClr val="1F3A5F"/>
                           </a:solidFill>
                         </a:rPr>
-                        <a:t>2.6 σ</a:t>
+                        <a:t>3.5 σ</a:t>
                       </a:r>
                     </a:p>
                   </a:txBody>
@@ -5493,7 +5493,7 @@
                             <a:srgbClr val="1F3A5F"/>
                           </a:solidFill>
                         </a:rPr>
-                        <a:t>3.9 σ</a:t>
+                        <a:t>5.1 σ</a:t>
                       </a:r>
                     </a:p>
                   </a:txBody>
@@ -5515,7 +5515,7 @@
                             <a:srgbClr val="1F3A5F"/>
                           </a:solidFill>
                         </a:rPr>
-                        <a:t>1.2</a:t>
+                        <a:t>1.5</a:t>
                       </a:r>
                     </a:p>
                   </a:txBody>
@@ -5561,7 +5561,7 @@
                             <a:srgbClr val="1F3A5F"/>
                           </a:solidFill>
                         </a:rPr>
-                        <a:t>220 / 10 600</a:t>
+                        <a:t>312 / 12 307</a:t>
                       </a:r>
                     </a:p>
                   </a:txBody>
@@ -5583,7 +5583,7 @@
                             <a:srgbClr val="1F3A5F"/>
                           </a:solidFill>
                         </a:rPr>
-                        <a:t>4.9 σ</a:t>
+                        <a:t>6.4 σ</a:t>
                       </a:r>
                     </a:p>
                   </a:txBody>
@@ -5605,7 +5605,7 @@
                             <a:srgbClr val="1F3A5F"/>
                           </a:solidFill>
                         </a:rPr>
-                        <a:t>7.3 σ</a:t>
+                        <a:t>9.6 σ</a:t>
                       </a:r>
                     </a:p>
                   </a:txBody>
@@ -5627,7 +5627,7 @@
                             <a:srgbClr val="1F3A5F"/>
                           </a:solidFill>
                         </a:rPr>
-                        <a:t>2.1</a:t>
+                        <a:t>2.8</a:t>
                       </a:r>
                     </a:p>
                   </a:txBody>
@@ -5705,7 +5705,7 @@
                   <a:srgbClr val="555555"/>
                 </a:solidFill>
               </a:rPr>
-              <a:t>Same templates as slides 4–5: best-estimator (target-centre chord) capsule multiple-scattering smearing; α_IPC = 3.5×10⁻³, X17/IPC = 2.5%, MM-double acceptance.</a:t>
+              <a:t>Same templates as slides 4–5: best-estimator (target-centre chord) capsule multiple-scattering smearing; α_IPC = 3.5×10⁻³, X17/IPC = 2.5%, nose-first MM-double acceptance.</a:t>
             </a:r>
           </a:p>
           <a:p>
@@ -5878,7 +5878,7 @@
                   <a:srgbClr val="5A1010"/>
                 </a:solidFill>
               </a:rPr>
-              <a:t>•  Read 2.6σ / 4.9σ as a best-case ceiling. A defensible CL needs the MEASURED IPC shape + full detector response folded in (open work).</a:t>
+              <a:t>•  Read 3.5σ / 6.4σ as a best-case ceiling. A defensible CL needs the MEASURED IPC shape + full detector response folded in (open work).</a:t>
             </a:r>
           </a:p>
         </p:txBody>
@@ -6048,7 +6048,7 @@
                   <a:srgbClr val="1F3A5F"/>
                 </a:solidFill>
               </a:rPr>
-              <a:t>July (current hardware): ~64 recorded X17 / 30 d.</a:t>
+              <a:t>July (current hardware): ~91 recorded X17 / 30 d.</a:t>
             </a:r>
           </a:p>
           <a:p>
@@ -6063,7 +6063,7 @@
                   <a:srgbClr val="555555"/>
                 </a:solidFill>
               </a:rPr>
-              <a:t>Window 0.2–0.7 MeV under a conservative γ-flash recovery; on ~3 100 IPC (S/B ≈ 0.02). Extractable by a template fit, not a peak cut.</a:t>
+              <a:t>Window 0.2–0.7 MeV under a conservative γ-flash recovery; on ~3 600 IPC (S/B ≈ 0.025), nose-first. Extractable by a template fit, not a peak cut.</a:t>
             </a:r>
           </a:p>
           <a:p>
@@ -6081,7 +6081,7 @@
                   <a:srgbClr val="1F3A5F"/>
                 </a:solidFill>
               </a:rPr>
-              <a:t>Post-LS3: ~220 recorded X17 / 30 d.</a:t>
+              <a:t>Post-LS3: ~312 recorded X17 / 30 d.</a:t>
             </a:r>
           </a:p>
           <a:p>
@@ -6498,7 +6498,7 @@
                   <a:srgbClr val="1F3A5F"/>
                 </a:solidFill>
               </a:rPr>
-              <a:t>≈ 64 X17 on ≈ 3 100 IPC</a:t>
+              <a:t>≈ 91 X17 on ≈ 3 600 IPC</a:t>
             </a:r>
           </a:p>
           <a:p>
@@ -6745,7 +6745,7 @@
                   <a:srgbClr val="1F3A5F"/>
                 </a:solidFill>
               </a:rPr>
-              <a:t>July 64 X17 → post-LS3 220 X17 recorded (30 d), same S/B ≈ 0.021.</a:t>
+              <a:t>July 91 X17 → post-LS3 312 X17 recorded (30 d), same S/B ≈ 0.021.</a:t>
             </a:r>
           </a:p>
           <a:p>
@@ -6918,8 +6918,8 @@
         </p:blipFill>
         <p:spPr>
           <a:xfrm>
-            <a:off x="1113398" y="1417320"/>
-            <a:ext cx="5088403" cy="5212080"/>
+            <a:off x="1113065" y="1417320"/>
+            <a:ext cx="5089070" cy="5212080"/>
           </a:xfrm>
           <a:prstGeom prst="rect">
             <a:avLst/>
@@ -7552,7 +7552,7 @@
                   <a:srgbClr val="1F3A5F"/>
                 </a:solidFill>
               </a:rPr>
-              <a:t>≈ 64 X17 on ≈ 3 100 IPC</a:t>
+              <a:t>≈ 91 X17 on ≈ 3 600 IPC</a:t>
             </a:r>
           </a:p>
           <a:p>
@@ -7698,7 +7698,7 @@
                   <a:srgbClr val="6B5510"/>
                 </a:solidFill>
               </a:rPr>
-              <a:t>•  At-rest kinematics (shoulder shifts a few degrees with the Eₙ boost). MM-double acceptance 19.6% (X17) / 23.6% (IPC).</a:t>
+              <a:t>•  At-rest kinematics (shoulder shifts a few degrees with the Eₙ boost). MM-double acceptance 27.8% (X17) / 27.4% (IPC), nose-first (was 19.6/23.6 pre-flip).</a:t>
             </a:r>
           </a:p>
         </p:txBody>
@@ -7897,7 +7897,7 @@
                   <a:srgbClr val="1F3A5F"/>
                 </a:solidFill>
               </a:rPr>
-              <a:t>July 64 X17 → post-LS3 220 X17 recorded (30 d), on the same S/B ≈ 0.021.</a:t>
+              <a:t>July 91 X17 → post-LS3 312 X17 recorded (30 d), on the same S/B ≈ 0.021.</a:t>
             </a:r>
           </a:p>
           <a:p>
@@ -8207,8 +8207,8 @@
         </p:blipFill>
         <p:spPr>
           <a:xfrm>
-            <a:off x="228600" y="1557462"/>
-            <a:ext cx="6492240" cy="4657476"/>
+            <a:off x="534108" y="1417320"/>
+            <a:ext cx="5881224" cy="4937760"/>
           </a:xfrm>
           <a:prstGeom prst="rect">
             <a:avLst/>
